--- a/dist/초5/수학/자료/초5_수학_자료_01_평균.pptx
+++ b/dist/초5/수학/자료/초5_수학_자료_01_평균.pptx
@@ -121,13 +121,13 @@
   <p:extLst>
     <p:ext uri="{521415D9-36F7-43E2-AB2F-B90AF26B5E84}">
       <p14:sectionLst xmlns:p14="http://schemas.microsoft.com/office/powerpoint/2010/main">
-        <p14:section name="도입" id="{53219e7f-5524-8fbb-aec9-3d151e7951c9}">
+        <p14:section name="도입" id="{89a12841-dbf0-d1e7-2143-091ba26b0589}">
           <p14:sldIdLst>
             <p14:sldId id="256"/>
             <p14:sldId id="257"/>
           </p14:sldIdLst>
         </p14:section>
-        <p14:section name="개념" id="{fee4c1e2-b29b-0e39-c12f-1d762df7ab02}">
+        <p14:section name="개념" id="{bcf03bcc-f6cb-fd53-86ae-139e494fc8f3}">
           <p14:sldIdLst>
             <p14:sldId id="258"/>
             <p14:sldId id="259"/>
@@ -135,7 +135,7 @@
             <p14:sldId id="264"/>
           </p14:sldIdLst>
         </p14:section>
-        <p14:section name="연습" id="{cad1e776-503e-2838-6c88-673e61ecc9e8}">
+        <p14:section name="연습" id="{b560780b-8d51-d765-138e-f5616f95eaaf}">
           <p14:sldIdLst>
             <p14:sldId id="261"/>
             <p14:sldId id="262"/>
@@ -143,25 +143,25 @@
             <p14:sldId id="265"/>
           </p14:sldIdLst>
         </p14:section>
-        <p14:section name="개념" id="{bcbabf7c-b3e6-4e3c-fce4-92a260aa0bfd}">
+        <p14:section name="개념" id="{b79a3301-2f57-2383-47cf-432238a58758}">
           <p14:sldIdLst/>
         </p14:section>
-        <p14:section name="연습" id="{e644e283-f01b-8f6b-4bcf-15f24b6cbb3d}">
+        <p14:section name="연습" id="{b459b851-a7ec-ec29-6cee-2a8e8760c5a0}">
           <p14:sldIdLst/>
         </p14:section>
-        <p14:section name="확인" id="{e24ec30f-3cdb-5ac9-6e04-2c3807f085b2}">
+        <p14:section name="확인" id="{350472e1-f266-bfa7-7258-eacd036de6e3}">
           <p14:sldIdLst>
             <p14:sldId id="266"/>
             <p14:sldId id="267"/>
             <p14:sldId id="268"/>
           </p14:sldIdLst>
         </p14:section>
-        <p14:section name="정리" id="{5fef5bb5-1912-f5a0-d2d9-d214834f2fc6}">
+        <p14:section name="정리" id="{19c01264-3591-adf3-869e-e7b9aaa2bdcf}">
           <p14:sldIdLst>
             <p14:sldId id="269"/>
           </p14:sldIdLst>
         </p14:section>
-        <p14:section name="보충" id="{152655c1-9ae6-e143-4300-f39187e0ffd0}">
+        <p14:section name="보충" id="{35dddfa7-f675-9f52-babc-3a95655470a8}">
           <p14:sldIdLst>
             <p14:sldId id="270"/>
           </p14:sldIdLst>
@@ -4425,7 +4425,7 @@
           </p:nvPr>
         </p:nvGraphicFramePr>
         <p:xfrm>
-          <a:off x="6277356" y="3004185"/>
+          <a:off x="6277356" y="3003042"/>
           <a:ext cx="5362956" cy="914400"/>
         </p:xfrm>
         <a:graphic>
@@ -4436,7 +4436,7 @@
                 <a:gridCol w="2252442"/>
                 <a:gridCol w="3110514"/>
               </a:tblGrid>
-              <a:tr h="511810">
+              <a:tr h="512572">
                 <a:tc>
                   <a:txBody>
                     <a:bodyPr/>
@@ -4574,7 +4574,7 @@
                   </a:tcPr>
                 </a:tc>
               </a:tr>
-              <a:tr h="511810">
+              <a:tr h="512572">
                 <a:tc>
                   <a:txBody>
                     <a:bodyPr/>
@@ -4712,7 +4712,7 @@
                   </a:tcPr>
                 </a:tc>
               </a:tr>
-              <a:tr h="511810">
+              <a:tr h="512572">
                 <a:tc>
                   <a:txBody>
                     <a:bodyPr/>
@@ -17359,7 +17359,7 @@
           </p:nvPr>
         </p:nvGraphicFramePr>
         <p:xfrm>
-          <a:off x="6307074" y="3642360"/>
+          <a:off x="6307074" y="3633216"/>
           <a:ext cx="5303520" cy="914400"/>
         </p:xfrm>
         <a:graphic>
@@ -17374,7 +17374,7 @@
                 <a:gridCol w="742493"/>
                 <a:gridCol w="742493"/>
               </a:tblGrid>
-              <a:tr h="472440">
+              <a:tr h="481584">
                 <a:tc>
                   <a:txBody>
                     <a:bodyPr/>
@@ -17784,7 +17784,7 @@
                   </a:tcPr>
                 </a:tc>
               </a:tr>
-              <a:tr h="472440">
+              <a:tr h="481584">
                 <a:tc>
                   <a:txBody>
                     <a:bodyPr/>
@@ -18928,7 +18928,7 @@
           </p:nvPr>
         </p:nvGraphicFramePr>
         <p:xfrm>
-          <a:off x="1751076" y="2179574"/>
+          <a:off x="1751076" y="2178812"/>
           <a:ext cx="8686800" cy="914400"/>
         </p:xfrm>
         <a:graphic>
@@ -18942,7 +18942,7 @@
                 <a:gridCol w="1476756"/>
                 <a:gridCol w="1476756"/>
               </a:tblGrid>
-              <a:tr h="511810">
+              <a:tr h="512572">
                 <a:tc>
                   <a:txBody>
                     <a:bodyPr/>
@@ -19284,7 +19284,7 @@
                   </a:tcPr>
                 </a:tc>
               </a:tr>
-              <a:tr h="511810">
+              <a:tr h="512572">
                 <a:tc>
                   <a:txBody>
                     <a:bodyPr/>
@@ -19798,7 +19798,7 @@
           </p:nvPr>
         </p:nvGraphicFramePr>
         <p:xfrm>
-          <a:off x="6599133" y="3703320"/>
+          <a:off x="6599133" y="3689604"/>
           <a:ext cx="5041179" cy="914400"/>
         </p:xfrm>
         <a:graphic>
@@ -19809,7 +19809,7 @@
                 <a:gridCol w="2117295"/>
                 <a:gridCol w="2923884"/>
               </a:tblGrid>
-              <a:tr h="472440">
+              <a:tr h="481584">
                 <a:tc>
                   <a:txBody>
                     <a:bodyPr/>
@@ -19947,7 +19947,7 @@
                   </a:tcPr>
                 </a:tc>
               </a:tr>
-              <a:tr h="472440">
+              <a:tr h="481584">
                 <a:tc>
                   <a:txBody>
                     <a:bodyPr/>
@@ -20085,7 +20085,7 @@
                   </a:tcPr>
                 </a:tc>
               </a:tr>
-              <a:tr h="472440">
+              <a:tr h="481584">
                 <a:tc>
                   <a:txBody>
                     <a:bodyPr/>
